--- a/dist/초3/수학/도형과측정/초3_수학_도형과측정_02_직각과직사각형·정사각형_학생용.pptx
+++ b/dist/초3/수학/도형과측정/초3_수학_도형과측정_02_직각과직사각형·정사각형_학생용.pptx
@@ -119,13 +119,13 @@
   <p:extLst>
     <p:ext uri="{521415D9-36F7-43E2-AB2F-B90AF26B5E84}">
       <p14:sectionLst xmlns:p14="http://schemas.microsoft.com/office/powerpoint/2010/main">
-        <p14:section name="도입" id="{bf54cdd1-2e3e-cec0-238e-54ce71b34d7b}">
+        <p14:section name="도입" id="{fe453fcf-70ba-3e5e-77ac-287dc2320cc7}">
           <p14:sldIdLst>
             <p14:sldId id="256"/>
             <p14:sldId id="257"/>
           </p14:sldIdLst>
         </p14:section>
-        <p14:section name="개념" id="{a0180f68-d15f-fd33-8f01-0c49cd818c25}">
+        <p14:section name="개념" id="{82da94b7-8a35-8545-8406-4e8a2567b3e5}">
           <p14:sldIdLst>
             <p14:sldId id="258"/>
             <p14:sldId id="259"/>
@@ -133,31 +133,31 @@
             <p14:sldId id="262"/>
           </p14:sldIdLst>
         </p14:section>
-        <p14:section name="연습" id="{fccb896e-5555-590c-563d-358c20e423ba}">
+        <p14:section name="연습" id="{6b7c256d-2673-6388-d565-955e2cb6cc7b}">
           <p14:sldIdLst>
             <p14:sldId id="260"/>
             <p14:sldId id="263"/>
             <p14:sldId id="264"/>
           </p14:sldIdLst>
         </p14:section>
-        <p14:section name="개념" id="{f5a8eae9-d691-3b96-b62c-41a7ea6714a3}">
+        <p14:section name="개념" id="{1fa28b5d-1402-e35d-6963-58d1b93352ac}">
           <p14:sldIdLst/>
         </p14:section>
-        <p14:section name="연습" id="{c780ba23-7416-af60-0c8a-f4134acf5d38}">
+        <p14:section name="연습" id="{4f37c0da-ec5a-4329-c3af-c81a6324ab92}">
           <p14:sldIdLst/>
         </p14:section>
-        <p14:section name="확인" id="{4c7c0de3-2d98-59ae-11e6-6929588bf19a}">
+        <p14:section name="확인" id="{73a96ce8-c648-772e-46ac-5fb17e2f906c}">
           <p14:sldIdLst>
             <p14:sldId id="265"/>
             <p14:sldId id="266"/>
           </p14:sldIdLst>
         </p14:section>
-        <p14:section name="정리" id="{e39840f4-1d09-0bfe-da03-ae25cd938f8e}">
+        <p14:section name="정리" id="{ee6c2bde-e389-4600-43e7-94efddd7a34b}">
           <p14:sldIdLst>
             <p14:sldId id="267"/>
           </p14:sldIdLst>
         </p14:section>
-        <p14:section name="보충" id="{11fe7b5f-9820-aefb-e914-b2251ab99680}">
+        <p14:section name="보충" id="{46b05882-519a-ad70-de82-91f537657539}">
           <p14:sldIdLst>
             <p14:sldId id="268"/>
           </p14:sldIdLst>
@@ -6071,8 +6071,8 @@
         </p:nvSpPr>
         <p:spPr>
           <a:xfrm>
-            <a:off x="3367877" y="2601240"/>
-            <a:ext cx="408432" cy="381000"/>
+            <a:off x="3318093" y="2537740"/>
+            <a:ext cx="508000" cy="508000"/>
           </a:xfrm>
           <a:prstGeom prst="rect">
             <a:avLst/>
@@ -6088,7 +6088,7 @@
               <a:buNone/>
             </a:pPr>
             <a:r>
-              <a:rPr lang="ko-KR" altLang="en-US" sz="2400" b="1" dirty="0">
+              <a:rPr lang="ko-KR" altLang="en-US" sz="3200" b="1" dirty="0">
                 <a:solidFill>
                   <a:srgbClr val="1F2937"/>
                 </a:solidFill>
@@ -6098,7 +6098,7 @@
               </a:rPr>
               <a:t>ㄱ</a:t>
             </a:r>
-            <a:endParaRPr lang="ko-KR" sz="2400" dirty="0"/>
+            <a:endParaRPr lang="ko-KR" sz="3200" dirty="0"/>
           </a:p>
         </p:txBody>
       </p:sp>
@@ -6110,8 +6110,8 @@
         </p:nvSpPr>
         <p:spPr>
           <a:xfrm>
-            <a:off x="1438004" y="5160216"/>
-            <a:ext cx="408432" cy="381000"/>
+            <a:off x="1388220" y="5096716"/>
+            <a:ext cx="508000" cy="508000"/>
           </a:xfrm>
           <a:prstGeom prst="rect">
             <a:avLst/>
@@ -6127,7 +6127,7 @@
               <a:buNone/>
             </a:pPr>
             <a:r>
-              <a:rPr lang="ko-KR" altLang="en-US" sz="2400" b="1" dirty="0">
+              <a:rPr lang="ko-KR" altLang="en-US" sz="3200" b="1" dirty="0">
                 <a:solidFill>
                   <a:srgbClr val="1F2937"/>
                 </a:solidFill>
@@ -6137,7 +6137,7 @@
               </a:rPr>
               <a:t>ㄴ</a:t>
             </a:r>
-            <a:endParaRPr lang="ko-KR" sz="2400" dirty="0"/>
+            <a:endParaRPr lang="ko-KR" sz="3200" dirty="0"/>
           </a:p>
         </p:txBody>
       </p:sp>
@@ -6149,8 +6149,8 @@
         </p:nvSpPr>
         <p:spPr>
           <a:xfrm>
-            <a:off x="4641342" y="5047640"/>
-            <a:ext cx="408432" cy="381000"/>
+            <a:off x="4591558" y="4984140"/>
+            <a:ext cx="508000" cy="508000"/>
           </a:xfrm>
           <a:prstGeom prst="rect">
             <a:avLst/>
@@ -6166,7 +6166,7 @@
               <a:buNone/>
             </a:pPr>
             <a:r>
-              <a:rPr lang="ko-KR" altLang="en-US" sz="2400" b="1" dirty="0">
+              <a:rPr lang="ko-KR" altLang="en-US" sz="3200" b="1" dirty="0">
                 <a:solidFill>
                   <a:srgbClr val="1F2937"/>
                 </a:solidFill>
@@ -6176,7 +6176,7 @@
               </a:rPr>
               <a:t>ㄷ</a:t>
             </a:r>
-            <a:endParaRPr lang="ko-KR" sz="2400" dirty="0"/>
+            <a:endParaRPr lang="ko-KR" sz="3200" dirty="0"/>
           </a:p>
         </p:txBody>
       </p:sp>
@@ -6668,8 +6668,8 @@
         </p:nvSpPr>
         <p:spPr>
           <a:xfrm>
-            <a:off x="8673904" y="2626156"/>
-            <a:ext cx="408432" cy="381000"/>
+            <a:off x="8624120" y="2562656"/>
+            <a:ext cx="508000" cy="508000"/>
           </a:xfrm>
           <a:prstGeom prst="rect">
             <a:avLst/>
@@ -6685,7 +6685,7 @@
               <a:buNone/>
             </a:pPr>
             <a:r>
-              <a:rPr lang="ko-KR" altLang="en-US" sz="2400" b="1" dirty="0">
+              <a:rPr lang="ko-KR" altLang="en-US" sz="3200" b="1" dirty="0">
                 <a:solidFill>
                   <a:srgbClr val="1F2937"/>
                 </a:solidFill>
@@ -6695,7 +6695,7 @@
               </a:rPr>
               <a:t>ㄹ</a:t>
             </a:r>
-            <a:endParaRPr lang="ko-KR" sz="2400" dirty="0"/>
+            <a:endParaRPr lang="ko-KR" sz="3200" dirty="0"/>
           </a:p>
         </p:txBody>
       </p:sp>
@@ -6707,8 +6707,8 @@
         </p:nvSpPr>
         <p:spPr>
           <a:xfrm>
-            <a:off x="7360237" y="5132465"/>
-            <a:ext cx="408432" cy="381000"/>
+            <a:off x="7310453" y="5068965"/>
+            <a:ext cx="508000" cy="508000"/>
           </a:xfrm>
           <a:prstGeom prst="rect">
             <a:avLst/>
@@ -6724,7 +6724,7 @@
               <a:buNone/>
             </a:pPr>
             <a:r>
-              <a:rPr lang="ko-KR" altLang="en-US" sz="2400" b="1" dirty="0">
+              <a:rPr lang="ko-KR" altLang="en-US" sz="3200" b="1" dirty="0">
                 <a:solidFill>
                   <a:srgbClr val="1F2937"/>
                 </a:solidFill>
@@ -6734,7 +6734,7 @@
               </a:rPr>
               <a:t>ㅁ</a:t>
             </a:r>
-            <a:endParaRPr lang="ko-KR" sz="2400" dirty="0"/>
+            <a:endParaRPr lang="ko-KR" sz="3200" dirty="0"/>
           </a:p>
         </p:txBody>
       </p:sp>
@@ -6746,8 +6746,8 @@
         </p:nvSpPr>
         <p:spPr>
           <a:xfrm>
-            <a:off x="10187178" y="5001463"/>
-            <a:ext cx="408432" cy="381000"/>
+            <a:off x="10137394" y="4937963"/>
+            <a:ext cx="508000" cy="508000"/>
           </a:xfrm>
           <a:prstGeom prst="rect">
             <a:avLst/>
@@ -6763,7 +6763,7 @@
               <a:buNone/>
             </a:pPr>
             <a:r>
-              <a:rPr lang="ko-KR" altLang="en-US" sz="2400" b="1" dirty="0">
+              <a:rPr lang="ko-KR" altLang="en-US" sz="3200" b="1" dirty="0">
                 <a:solidFill>
                   <a:srgbClr val="1F2937"/>
                 </a:solidFill>
@@ -6773,7 +6773,7 @@
               </a:rPr>
               <a:t>ㅂ</a:t>
             </a:r>
-            <a:endParaRPr lang="ko-KR" sz="2400" dirty="0"/>
+            <a:endParaRPr lang="ko-KR" sz="3200" dirty="0"/>
           </a:p>
         </p:txBody>
       </p:sp>
@@ -7895,8 +7895,8 @@
         </p:nvSpPr>
         <p:spPr>
           <a:xfrm>
-            <a:off x="1654302" y="2308860"/>
-            <a:ext cx="408432" cy="381000"/>
+            <a:off x="1604518" y="2245360"/>
+            <a:ext cx="508000" cy="508000"/>
           </a:xfrm>
           <a:prstGeom prst="rect">
             <a:avLst/>
@@ -7912,7 +7912,7 @@
               <a:buNone/>
             </a:pPr>
             <a:r>
-              <a:rPr lang="ko-KR" altLang="en-US" sz="2400" b="1" dirty="0">
+              <a:rPr lang="ko-KR" altLang="en-US" sz="3200" b="1" dirty="0">
                 <a:solidFill>
                   <a:srgbClr val="1F2937"/>
                 </a:solidFill>
@@ -7922,7 +7922,7 @@
               </a:rPr>
               <a:t>ㄱ</a:t>
             </a:r>
-            <a:endParaRPr lang="ko-KR" sz="2400" dirty="0"/>
+            <a:endParaRPr lang="ko-KR" sz="3200" dirty="0"/>
           </a:p>
         </p:txBody>
       </p:sp>
@@ -7934,8 +7934,8 @@
         </p:nvSpPr>
         <p:spPr>
           <a:xfrm>
-            <a:off x="1481881" y="5468321"/>
-            <a:ext cx="408432" cy="381000"/>
+            <a:off x="1432097" y="5404821"/>
+            <a:ext cx="508000" cy="508000"/>
           </a:xfrm>
           <a:prstGeom prst="rect">
             <a:avLst/>
@@ -7951,7 +7951,7 @@
               <a:buNone/>
             </a:pPr>
             <a:r>
-              <a:rPr lang="ko-KR" altLang="en-US" sz="2400" b="1" dirty="0">
+              <a:rPr lang="ko-KR" altLang="en-US" sz="3200" b="1" dirty="0">
                 <a:solidFill>
                   <a:srgbClr val="1F2937"/>
                 </a:solidFill>
@@ -7961,7 +7961,7 @@
               </a:rPr>
               <a:t>ㄴ</a:t>
             </a:r>
-            <a:endParaRPr lang="ko-KR" sz="2400" dirty="0"/>
+            <a:endParaRPr lang="ko-KR" sz="3200" dirty="0"/>
           </a:p>
         </p:txBody>
       </p:sp>
@@ -7973,8 +7973,8 @@
         </p:nvSpPr>
         <p:spPr>
           <a:xfrm>
-            <a:off x="4641342" y="5295900"/>
-            <a:ext cx="408432" cy="381000"/>
+            <a:off x="4591558" y="5232400"/>
+            <a:ext cx="508000" cy="508000"/>
           </a:xfrm>
           <a:prstGeom prst="rect">
             <a:avLst/>
@@ -7990,7 +7990,7 @@
               <a:buNone/>
             </a:pPr>
             <a:r>
-              <a:rPr lang="ko-KR" altLang="en-US" sz="2400" b="1" dirty="0">
+              <a:rPr lang="ko-KR" altLang="en-US" sz="3200" b="1" dirty="0">
                 <a:solidFill>
                   <a:srgbClr val="1F2937"/>
                 </a:solidFill>
@@ -8000,7 +8000,7 @@
               </a:rPr>
               <a:t>ㄷ</a:t>
             </a:r>
-            <a:endParaRPr lang="ko-KR" sz="2400" dirty="0"/>
+            <a:endParaRPr lang="ko-KR" sz="3200" dirty="0"/>
           </a:p>
         </p:txBody>
       </p:sp>
@@ -9546,8 +9546,8 @@
         </p:nvSpPr>
         <p:spPr>
           <a:xfrm>
-            <a:off x="1036320" y="4032533"/>
-            <a:ext cx="2193798" cy="1096899"/>
+            <a:off x="914400" y="4027961"/>
+            <a:ext cx="2315718" cy="1157859"/>
           </a:xfrm>
           <a:custGeom>
             <a:avLst/>
@@ -9556,15 +9556,15 @@
             <a:cxnLst/>
             <a:rect l="l" t="t" r="r" b="b"/>
             <a:pathLst>
-              <a:path w="2193798" h="1096899">
+              <a:path w="2315718" h="1157859">
                 <a:moveTo>
-                  <a:pt x="0" y="1096899"/>
+                  <a:pt x="0" y="1157859"/>
                 </a:moveTo>
                 <a:lnTo>
-                  <a:pt x="2193798" y="1096899"/>
+                  <a:pt x="2315718" y="1157859"/>
                 </a:lnTo>
                 <a:lnTo>
-                  <a:pt x="2193798" y="0"/>
+                  <a:pt x="2315718" y="0"/>
                 </a:lnTo>
                 <a:lnTo>
                   <a:pt x="0" y="0"/>
@@ -9587,8 +9587,8 @@
         </p:nvSpPr>
         <p:spPr>
           <a:xfrm>
-            <a:off x="3778568" y="3484083"/>
-            <a:ext cx="1645348" cy="1645349"/>
+            <a:off x="3809048" y="3449031"/>
+            <a:ext cx="1736789" cy="1736789"/>
           </a:xfrm>
           <a:custGeom>
             <a:avLst/>
@@ -9597,15 +9597,15 @@
             <a:cxnLst/>
             <a:rect l="l" t="t" r="r" b="b"/>
             <a:pathLst>
-              <a:path w="1645348" h="1645349">
+              <a:path w="1736789" h="1736789">
                 <a:moveTo>
-                  <a:pt x="0" y="1645349"/>
+                  <a:pt x="0" y="1736789"/>
                 </a:moveTo>
                 <a:lnTo>
-                  <a:pt x="1645348" y="1645349"/>
+                  <a:pt x="1736789" y="1736789"/>
                 </a:lnTo>
                 <a:lnTo>
-                  <a:pt x="1645348" y="0"/>
+                  <a:pt x="1736789" y="0"/>
                 </a:lnTo>
                 <a:lnTo>
                   <a:pt x="0" y="0"/>
@@ -9628,8 +9628,8 @@
         </p:nvSpPr>
         <p:spPr>
           <a:xfrm flipV="1">
-            <a:off x="1036320" y="3100168"/>
-            <a:ext cx="0" cy="2029263"/>
+            <a:off x="914400" y="3043780"/>
+            <a:ext cx="0" cy="2142039"/>
           </a:xfrm>
           <a:prstGeom prst="line">
             <a:avLst/>
@@ -9651,8 +9651,8 @@
         </p:nvSpPr>
         <p:spPr>
           <a:xfrm flipV="1">
-            <a:off x="1584770" y="3100168"/>
-            <a:ext cx="0" cy="2029263"/>
+            <a:off x="1493330" y="3043780"/>
+            <a:ext cx="0" cy="2142039"/>
           </a:xfrm>
           <a:prstGeom prst="line">
             <a:avLst/>
@@ -9674,8 +9674,8 @@
         </p:nvSpPr>
         <p:spPr>
           <a:xfrm flipV="1">
-            <a:off x="2133219" y="3100168"/>
-            <a:ext cx="0" cy="2029263"/>
+            <a:off x="2072259" y="3043780"/>
+            <a:ext cx="0" cy="2142039"/>
           </a:xfrm>
           <a:prstGeom prst="line">
             <a:avLst/>
@@ -9697,8 +9697,8 @@
         </p:nvSpPr>
         <p:spPr>
           <a:xfrm flipV="1">
-            <a:off x="2681669" y="3100168"/>
-            <a:ext cx="0" cy="2029263"/>
+            <a:off x="2651189" y="3043780"/>
+            <a:ext cx="0" cy="2142039"/>
           </a:xfrm>
           <a:prstGeom prst="line">
             <a:avLst/>
@@ -9720,8 +9720,8 @@
         </p:nvSpPr>
         <p:spPr>
           <a:xfrm flipV="1">
-            <a:off x="3230118" y="3100168"/>
-            <a:ext cx="0" cy="2029263"/>
+            <a:off x="3230118" y="3043780"/>
+            <a:ext cx="0" cy="2142039"/>
           </a:xfrm>
           <a:prstGeom prst="line">
             <a:avLst/>
@@ -9743,8 +9743,8 @@
         </p:nvSpPr>
         <p:spPr>
           <a:xfrm flipV="1">
-            <a:off x="3778568" y="3100168"/>
-            <a:ext cx="0" cy="2029263"/>
+            <a:off x="3809048" y="3043780"/>
+            <a:ext cx="0" cy="2142039"/>
           </a:xfrm>
           <a:prstGeom prst="line">
             <a:avLst/>
@@ -9766,8 +9766,8 @@
         </p:nvSpPr>
         <p:spPr>
           <a:xfrm flipV="1">
-            <a:off x="4327017" y="3100168"/>
-            <a:ext cx="0" cy="2029263"/>
+            <a:off x="4387977" y="3043780"/>
+            <a:ext cx="0" cy="2142039"/>
           </a:xfrm>
           <a:prstGeom prst="line">
             <a:avLst/>
@@ -9789,8 +9789,8 @@
         </p:nvSpPr>
         <p:spPr>
           <a:xfrm flipV="1">
-            <a:off x="4875467" y="3100168"/>
-            <a:ext cx="0" cy="2029263"/>
+            <a:off x="4966907" y="3043780"/>
+            <a:ext cx="0" cy="2142039"/>
           </a:xfrm>
           <a:prstGeom prst="line">
             <a:avLst/>
@@ -9812,8 +9812,8 @@
         </p:nvSpPr>
         <p:spPr>
           <a:xfrm flipV="1">
-            <a:off x="5423916" y="3100168"/>
-            <a:ext cx="0" cy="2029263"/>
+            <a:off x="5545836" y="3043780"/>
+            <a:ext cx="0" cy="2142039"/>
           </a:xfrm>
           <a:prstGeom prst="line">
             <a:avLst/>
@@ -9835,8 +9835,8 @@
         </p:nvSpPr>
         <p:spPr>
           <a:xfrm>
-            <a:off x="1036320" y="5129432"/>
-            <a:ext cx="4387596" cy="0"/>
+            <a:off x="914400" y="5185820"/>
+            <a:ext cx="4631436" cy="0"/>
           </a:xfrm>
           <a:prstGeom prst="line">
             <a:avLst/>
@@ -9858,8 +9858,8 @@
         </p:nvSpPr>
         <p:spPr>
           <a:xfrm>
-            <a:off x="1036320" y="4580982"/>
-            <a:ext cx="4387596" cy="0"/>
+            <a:off x="914400" y="4606890"/>
+            <a:ext cx="4631436" cy="0"/>
           </a:xfrm>
           <a:prstGeom prst="line">
             <a:avLst/>
@@ -9881,8 +9881,8 @@
         </p:nvSpPr>
         <p:spPr>
           <a:xfrm>
-            <a:off x="1036320" y="4032533"/>
-            <a:ext cx="4387596" cy="0"/>
+            <a:off x="914400" y="4027961"/>
+            <a:ext cx="4631436" cy="0"/>
           </a:xfrm>
           <a:prstGeom prst="line">
             <a:avLst/>
@@ -9904,8 +9904,8 @@
         </p:nvSpPr>
         <p:spPr>
           <a:xfrm>
-            <a:off x="1036320" y="3484083"/>
-            <a:ext cx="4387596" cy="0"/>
+            <a:off x="914400" y="3449031"/>
+            <a:ext cx="4631436" cy="0"/>
           </a:xfrm>
           <a:prstGeom prst="line">
             <a:avLst/>
@@ -9927,8 +9927,8 @@
         </p:nvSpPr>
         <p:spPr>
           <a:xfrm>
-            <a:off x="1036320" y="4032533"/>
-            <a:ext cx="2193798" cy="1096899"/>
+            <a:off x="914400" y="4027961"/>
+            <a:ext cx="2315718" cy="1157859"/>
           </a:xfrm>
           <a:custGeom>
             <a:avLst/>
@@ -9937,15 +9937,15 @@
             <a:cxnLst/>
             <a:rect l="l" t="t" r="r" b="b"/>
             <a:pathLst>
-              <a:path w="2193798" h="1096899">
+              <a:path w="2315718" h="1157859">
                 <a:moveTo>
-                  <a:pt x="0" y="1096899"/>
+                  <a:pt x="0" y="1157859"/>
                 </a:moveTo>
                 <a:lnTo>
-                  <a:pt x="2193798" y="1096899"/>
+                  <a:pt x="2315718" y="1157859"/>
                 </a:lnTo>
                 <a:lnTo>
-                  <a:pt x="2193798" y="0"/>
+                  <a:pt x="2315718" y="0"/>
                 </a:lnTo>
                 <a:lnTo>
                   <a:pt x="0" y="0"/>
@@ -9971,8 +9971,8 @@
         </p:nvSpPr>
         <p:spPr>
           <a:xfrm>
-            <a:off x="3778568" y="3484083"/>
-            <a:ext cx="1645348" cy="1645349"/>
+            <a:off x="3809048" y="3449031"/>
+            <a:ext cx="1736789" cy="1736789"/>
           </a:xfrm>
           <a:custGeom>
             <a:avLst/>
@@ -9981,15 +9981,15 @@
             <a:cxnLst/>
             <a:rect l="l" t="t" r="r" b="b"/>
             <a:pathLst>
-              <a:path w="1645348" h="1645349">
+              <a:path w="1736789" h="1736789">
                 <a:moveTo>
-                  <a:pt x="0" y="1645349"/>
+                  <a:pt x="0" y="1736789"/>
                 </a:moveTo>
                 <a:lnTo>
-                  <a:pt x="1645348" y="1645349"/>
+                  <a:pt x="1736789" y="1736789"/>
                 </a:lnTo>
                 <a:lnTo>
-                  <a:pt x="1645348" y="0"/>
+                  <a:pt x="1736789" y="0"/>
                 </a:lnTo>
                 <a:lnTo>
                   <a:pt x="0" y="0"/>
@@ -10015,7 +10015,7 @@
         </p:nvSpPr>
         <p:spPr>
           <a:xfrm>
-            <a:off x="1036320" y="4900832"/>
+            <a:off x="914400" y="4957220"/>
             <a:ext cx="228600" cy="228600"/>
           </a:xfrm>
           <a:custGeom>
@@ -10055,7 +10055,7 @@
         </p:nvSpPr>
         <p:spPr>
           <a:xfrm>
-            <a:off x="3001518" y="4900832"/>
+            <a:off x="3001518" y="4957220"/>
             <a:ext cx="228600" cy="228600"/>
           </a:xfrm>
           <a:custGeom>
@@ -10095,7 +10095,7 @@
         </p:nvSpPr>
         <p:spPr>
           <a:xfrm>
-            <a:off x="3001518" y="4032533"/>
+            <a:off x="3001518" y="4027961"/>
             <a:ext cx="228600" cy="228600"/>
           </a:xfrm>
           <a:custGeom>
@@ -10135,7 +10135,7 @@
         </p:nvSpPr>
         <p:spPr>
           <a:xfrm>
-            <a:off x="1036320" y="4032533"/>
+            <a:off x="914400" y="4027961"/>
             <a:ext cx="228600" cy="228600"/>
           </a:xfrm>
           <a:custGeom>
@@ -10175,7 +10175,7 @@
         </p:nvSpPr>
         <p:spPr>
           <a:xfrm>
-            <a:off x="3778568" y="4900832"/>
+            <a:off x="3809048" y="4957220"/>
             <a:ext cx="228600" cy="228600"/>
           </a:xfrm>
           <a:custGeom>
@@ -10215,7 +10215,7 @@
         </p:nvSpPr>
         <p:spPr>
           <a:xfrm>
-            <a:off x="5195316" y="4900832"/>
+            <a:off x="5317236" y="4957220"/>
             <a:ext cx="228600" cy="228600"/>
           </a:xfrm>
           <a:custGeom>
@@ -10255,7 +10255,7 @@
         </p:nvSpPr>
         <p:spPr>
           <a:xfrm>
-            <a:off x="5195316" y="3484083"/>
+            <a:off x="5317236" y="3449031"/>
             <a:ext cx="228600" cy="228600"/>
           </a:xfrm>
           <a:custGeom>
@@ -10295,7 +10295,7 @@
         </p:nvSpPr>
         <p:spPr>
           <a:xfrm>
-            <a:off x="3778568" y="3484083"/>
+            <a:off x="3809048" y="3449031"/>
             <a:ext cx="228600" cy="228600"/>
           </a:xfrm>
           <a:custGeom>
@@ -10335,8 +10335,8 @@
         </p:nvSpPr>
         <p:spPr>
           <a:xfrm>
-            <a:off x="1831467" y="5198012"/>
-            <a:ext cx="603504" cy="381000"/>
+            <a:off x="1767459" y="5269640"/>
+            <a:ext cx="609600" cy="381000"/>
           </a:xfrm>
           <a:prstGeom prst="rect">
             <a:avLst/>
@@ -10374,8 +10374,8 @@
         </p:nvSpPr>
         <p:spPr>
           <a:xfrm>
-            <a:off x="323088" y="4390482"/>
-            <a:ext cx="603504" cy="381000"/>
+            <a:off x="274320" y="4416390"/>
+            <a:ext cx="609600" cy="381000"/>
           </a:xfrm>
           <a:prstGeom prst="rect">
             <a:avLst/>
@@ -10413,8 +10413,8 @@
         </p:nvSpPr>
         <p:spPr>
           <a:xfrm>
-            <a:off x="4299490" y="5198012"/>
-            <a:ext cx="603504" cy="381000"/>
+            <a:off x="4372642" y="5269640"/>
+            <a:ext cx="609600" cy="381000"/>
           </a:xfrm>
           <a:prstGeom prst="rect">
             <a:avLst/>
@@ -10452,8 +10452,8 @@
         </p:nvSpPr>
         <p:spPr>
           <a:xfrm>
-            <a:off x="5533644" y="4116257"/>
-            <a:ext cx="603504" cy="381000"/>
+            <a:off x="5576316" y="4126925"/>
+            <a:ext cx="609600" cy="381000"/>
           </a:xfrm>
           <a:prstGeom prst="rect">
             <a:avLst/>
@@ -10491,7 +10491,7 @@
         </p:nvSpPr>
         <p:spPr>
           <a:xfrm>
-            <a:off x="1480947" y="2909668"/>
+            <a:off x="1419987" y="2853280"/>
             <a:ext cx="1304544" cy="381000"/>
           </a:xfrm>
           <a:prstGeom prst="rect">
@@ -10530,7 +10530,7 @@
         </p:nvSpPr>
         <p:spPr>
           <a:xfrm>
-            <a:off x="3948970" y="2909668"/>
+            <a:off x="4025170" y="2853280"/>
             <a:ext cx="1304544" cy="381000"/>
           </a:xfrm>
           <a:prstGeom prst="rect">
